--- a/技术方案与工作排期/slides_work/technical-route-trunk-v1/技术路线-主干链路版.pptx
+++ b/技术方案与工作排期/slides_work/technical-route-trunk-v1/技术路线-主干链路版.pptx
@@ -5,7 +5,7 @@
     <p:sldMasterId id="2147483648" r:id="rId1"/>
   </p:sldMasterIdLst>
   <p:notesMasterIdLst>
-    <p:notesMasterId r:id="rId11"/>
+    <p:notesMasterId r:id="rId12"/>
   </p:notesMasterIdLst>
   <p:sldIdLst>
     <p:sldId id="256" r:id="rId2"/>
@@ -17,6 +17,7 @@
     <p:sldId id="262" r:id="rId8"/>
     <p:sldId id="261" r:id="rId9"/>
     <p:sldId id="265" r:id="rId10"/>
+    <p:sldId id="266" r:id="rId11"/>
   </p:sldIdLst>
   <p:sldSz cx="12192000" cy="6858000"/>
   <p:notesSz cx="6858000" cy="12192000"/>
@@ -320,6 +321,114 @@
     <p:extLst>
       <p:ext uri="{BB962C8B-B14F-4D97-AF65-F5344CB8AC3E}">
         <p14:creationId xmlns:p14="http://schemas.microsoft.com/office/powerpoint/2010/main" val="1024086991"/>
+      </p:ext>
+    </p:extLst>
+  </p:cSld>
+  <p:clrMapOvr>
+    <a:masterClrMapping/>
+  </p:clrMapOvr>
+</p:notes>
+</file>
+
+<file path=ppt/notesSlides/notesSlide10.xml><?xml version="1.0" encoding="utf-8"?>
+<p:notes xmlns:a="http://schemas.openxmlformats.org/drawingml/2006/main" xmlns:r="http://schemas.openxmlformats.org/officeDocument/2006/relationships" xmlns:p="http://schemas.openxmlformats.org/presentationml/2006/main">
+  <p:cSld>
+    <p:spTree>
+      <p:nvGrpSpPr>
+        <p:cNvPr id="1" name="">
+          <a:extLst>
+            <a:ext uri="{FF2B5EF4-FFF2-40B4-BE49-F238E27FC236}">
+              <a16:creationId xmlns:a16="http://schemas.microsoft.com/office/drawing/2014/main" id="{481408BC-DD02-E15C-B068-5554B02B9B8A}"/>
+            </a:ext>
+          </a:extLst>
+        </p:cNvPr>
+        <p:cNvGrpSpPr/>
+        <p:nvPr/>
+      </p:nvGrpSpPr>
+      <p:grpSpPr>
+        <a:xfrm>
+          <a:off x="0" y="0"/>
+          <a:ext cx="0" cy="0"/>
+          <a:chOff x="0" y="0"/>
+          <a:chExt cx="0" cy="0"/>
+        </a:xfrm>
+      </p:grpSpPr>
+      <p:sp>
+        <p:nvSpPr>
+          <p:cNvPr id="2" name="Slide Image Placeholder 1">
+            <a:extLst>
+              <a:ext uri="{FF2B5EF4-FFF2-40B4-BE49-F238E27FC236}">
+                <a16:creationId xmlns:a16="http://schemas.microsoft.com/office/drawing/2014/main" id="{A284A7AC-511F-05BD-3DD2-C31CA35C87F6}"/>
+              </a:ext>
+            </a:extLst>
+          </p:cNvPr>
+          <p:cNvSpPr>
+            <a:spLocks noGrp="1" noRot="1" noChangeAspect="1"/>
+          </p:cNvSpPr>
+          <p:nvPr>
+            <p:ph type="sldImg"/>
+          </p:nvPr>
+        </p:nvSpPr>
+        <p:spPr/>
+      </p:sp>
+      <p:sp>
+        <p:nvSpPr>
+          <p:cNvPr id="3" name="Notes Placeholder 2">
+            <a:extLst>
+              <a:ext uri="{FF2B5EF4-FFF2-40B4-BE49-F238E27FC236}">
+                <a16:creationId xmlns:a16="http://schemas.microsoft.com/office/drawing/2014/main" id="{7E1A9FF6-8C4B-F046-C433-FAD199835BA3}"/>
+              </a:ext>
+            </a:extLst>
+          </p:cNvPr>
+          <p:cNvSpPr>
+            <a:spLocks noGrp="1"/>
+          </p:cNvSpPr>
+          <p:nvPr>
+            <p:ph type="body" idx="1"/>
+          </p:nvPr>
+        </p:nvSpPr>
+        <p:spPr/>
+        <p:txBody>
+          <a:bodyPr/>
+          <a:lstStyle/>
+          <a:p>
+            <a:endParaRPr lang="en-US" dirty="0"/>
+          </a:p>
+        </p:txBody>
+      </p:sp>
+      <p:sp>
+        <p:nvSpPr>
+          <p:cNvPr id="4" name="Slide Number Placeholder 3">
+            <a:extLst>
+              <a:ext uri="{FF2B5EF4-FFF2-40B4-BE49-F238E27FC236}">
+                <a16:creationId xmlns:a16="http://schemas.microsoft.com/office/drawing/2014/main" id="{44940A8C-45FF-A05D-0AF4-5F5843541AEF}"/>
+              </a:ext>
+            </a:extLst>
+          </p:cNvPr>
+          <p:cNvSpPr>
+            <a:spLocks noGrp="1"/>
+          </p:cNvSpPr>
+          <p:nvPr>
+            <p:ph type="sldNum" sz="quarter" idx="10"/>
+          </p:nvPr>
+        </p:nvSpPr>
+        <p:spPr/>
+        <p:txBody>
+          <a:bodyPr/>
+          <a:lstStyle/>
+          <a:p>
+            <a:fld id="{F7021451-1387-4CA6-816F-3879F97B5CBC}" type="slidenum">
+              <a:rPr lang="en-US"/>
+              <a:t>10</a:t>
+            </a:fld>
+            <a:endParaRPr lang="en-US"/>
+          </a:p>
+        </p:txBody>
+      </p:sp>
+    </p:spTree>
+    <p:extLst>
+      <p:ext uri="{BB962C8B-B14F-4D97-AF65-F5344CB8AC3E}">
+        <p14:creationId xmlns:p14="http://schemas.microsoft.com/office/powerpoint/2010/main" val="538733023"/>
       </p:ext>
     </p:extLst>
   </p:cSld>
@@ -1841,6 +1950,320 @@
 </p:sld>
 </file>
 
+<file path=ppt/slides/slide10.xml><?xml version="1.0" encoding="utf-8"?>
+<p:sld xmlns:a="http://schemas.openxmlformats.org/drawingml/2006/main" xmlns:r="http://schemas.openxmlformats.org/officeDocument/2006/relationships" xmlns:p="http://schemas.openxmlformats.org/presentationml/2006/main">
+  <p:cSld>
+    <p:spTree>
+      <p:nvGrpSpPr>
+        <p:cNvPr id="1" name="">
+          <a:extLst>
+            <a:ext uri="{FF2B5EF4-FFF2-40B4-BE49-F238E27FC236}">
+              <a16:creationId xmlns:a16="http://schemas.microsoft.com/office/drawing/2014/main" id="{0C3C9119-59FE-47EB-11B3-B15349974E8B}"/>
+            </a:ext>
+          </a:extLst>
+        </p:cNvPr>
+        <p:cNvGrpSpPr/>
+        <p:nvPr/>
+      </p:nvGrpSpPr>
+      <p:grpSpPr>
+        <a:xfrm>
+          <a:off x="0" y="0"/>
+          <a:ext cx="0" cy="0"/>
+          <a:chOff x="0" y="0"/>
+          <a:chExt cx="0" cy="0"/>
+        </a:xfrm>
+      </p:grpSpPr>
+      <p:sp>
+        <p:nvSpPr>
+          <p:cNvPr id="2" name="Shape 0">
+            <a:extLst>
+              <a:ext uri="{FF2B5EF4-FFF2-40B4-BE49-F238E27FC236}">
+                <a16:creationId xmlns:a16="http://schemas.microsoft.com/office/drawing/2014/main" id="{6C62EADF-DE47-E94D-9980-709B3D66E877}"/>
+              </a:ext>
+            </a:extLst>
+          </p:cNvPr>
+          <p:cNvSpPr/>
+          <p:nvPr/>
+        </p:nvSpPr>
+        <p:spPr>
+          <a:xfrm>
+            <a:off x="0" y="0"/>
+            <a:ext cx="12191695" cy="310896"/>
+          </a:xfrm>
+          <a:prstGeom prst="rect">
+            <a:avLst/>
+          </a:prstGeom>
+          <a:solidFill>
+            <a:srgbClr val="1A8EA8"/>
+          </a:solidFill>
+          <a:ln w="12700">
+            <a:solidFill>
+              <a:srgbClr val="F5FAFC">
+                <a:alpha val="0"/>
+              </a:srgbClr>
+            </a:solidFill>
+            <a:prstDash val="solid"/>
+          </a:ln>
+        </p:spPr>
+      </p:sp>
+      <p:sp>
+        <p:nvSpPr>
+          <p:cNvPr id="3" name="Shape 1">
+            <a:extLst>
+              <a:ext uri="{FF2B5EF4-FFF2-40B4-BE49-F238E27FC236}">
+                <a16:creationId xmlns:a16="http://schemas.microsoft.com/office/drawing/2014/main" id="{C2950EA5-7479-4480-8FDB-0219AACC1A7A}"/>
+              </a:ext>
+            </a:extLst>
+          </p:cNvPr>
+          <p:cNvSpPr/>
+          <p:nvPr/>
+        </p:nvSpPr>
+        <p:spPr>
+          <a:xfrm>
+            <a:off x="0" y="6510528"/>
+            <a:ext cx="12191695" cy="347472"/>
+          </a:xfrm>
+          <a:prstGeom prst="rect">
+            <a:avLst/>
+          </a:prstGeom>
+          <a:solidFill>
+            <a:srgbClr val="EAF3F6"/>
+          </a:solidFill>
+          <a:ln w="12700">
+            <a:solidFill>
+              <a:srgbClr val="F5FAFC">
+                <a:alpha val="0"/>
+              </a:srgbClr>
+            </a:solidFill>
+            <a:prstDash val="solid"/>
+          </a:ln>
+        </p:spPr>
+      </p:sp>
+      <p:sp>
+        <p:nvSpPr>
+          <p:cNvPr id="4" name="Text 2">
+            <a:extLst>
+              <a:ext uri="{FF2B5EF4-FFF2-40B4-BE49-F238E27FC236}">
+                <a16:creationId xmlns:a16="http://schemas.microsoft.com/office/drawing/2014/main" id="{AA577947-5960-9D68-F346-A0EDC8D42A77}"/>
+              </a:ext>
+            </a:extLst>
+          </p:cNvPr>
+          <p:cNvSpPr/>
+          <p:nvPr/>
+        </p:nvSpPr>
+        <p:spPr>
+          <a:xfrm>
+            <a:off x="777240" y="874343"/>
+            <a:ext cx="8046720" cy="4442123"/>
+          </a:xfrm>
+          <a:prstGeom prst="rect">
+            <a:avLst/>
+          </a:prstGeom>
+          <a:noFill/>
+          <a:ln/>
+        </p:spPr>
+        <p:txBody>
+          <a:bodyPr wrap="square" lIns="0" tIns="0" rIns="0" bIns="0" rtlCol="0" anchor="ctr"/>
+          <a:lstStyle/>
+          <a:p>
+            <a:pPr marL="0" indent="0">
+              <a:buNone/>
+            </a:pPr>
+            <a:r>
+              <a:rPr lang="zh-CN" altLang="en-US" sz="2396" dirty="0"/>
+              <a:t>需要定义的问题：</a:t>
+            </a:r>
+            <a:endParaRPr lang="en-US" altLang="zh-CN" sz="2396" dirty="0"/>
+          </a:p>
+          <a:p>
+            <a:pPr marL="457200" indent="-457200">
+              <a:buAutoNum type="arabicPeriod"/>
+            </a:pPr>
+            <a:r>
+              <a:rPr lang="zh-CN" altLang="en-US" sz="2396" dirty="0"/>
+              <a:t>出血有哪一些疾病？</a:t>
+            </a:r>
+            <a:endParaRPr lang="en-US" altLang="zh-CN" sz="2396" dirty="0"/>
+          </a:p>
+          <a:p>
+            <a:pPr marL="457200" indent="-457200">
+              <a:buAutoNum type="arabicPeriod"/>
+            </a:pPr>
+            <a:r>
+              <a:rPr lang="zh-CN" altLang="en-US" sz="2396" dirty="0"/>
+              <a:t>出血的症状</a:t>
+            </a:r>
+            <a:r>
+              <a:rPr lang="en-US" altLang="zh-CN" sz="2396" dirty="0"/>
+              <a:t>-</a:t>
+            </a:r>
+            <a:r>
+              <a:rPr lang="zh-CN" altLang="en-US" sz="2396" dirty="0"/>
+              <a:t>诊断</a:t>
+            </a:r>
+            <a:r>
+              <a:rPr lang="en-US" altLang="zh-CN" sz="2396" dirty="0"/>
+              <a:t>-</a:t>
+            </a:r>
+            <a:r>
+              <a:rPr lang="zh-CN" altLang="en-US" sz="2396" dirty="0"/>
+              <a:t>规划</a:t>
+            </a:r>
+            <a:r>
+              <a:rPr lang="en-US" altLang="zh-CN" sz="2396" dirty="0"/>
+              <a:t>-</a:t>
+            </a:r>
+            <a:r>
+              <a:rPr lang="zh-CN" altLang="en-US" sz="2396" dirty="0"/>
+              <a:t>治疗闭环</a:t>
+            </a:r>
+            <a:endParaRPr lang="en-US" altLang="zh-CN" sz="2396" dirty="0"/>
+          </a:p>
+          <a:p>
+            <a:pPr marL="457200" indent="-457200">
+              <a:buAutoNum type="arabicPeriod"/>
+            </a:pPr>
+            <a:r>
+              <a:rPr lang="zh-CN" altLang="en-US" sz="2396" dirty="0"/>
+              <a:t>出血的诊疗过程如何引入</a:t>
+            </a:r>
+            <a:r>
+              <a:rPr lang="en-US" altLang="zh-CN" sz="2396" dirty="0"/>
+              <a:t>ai</a:t>
+            </a:r>
+            <a:r>
+              <a:rPr lang="zh-CN" altLang="en-US" sz="2396" dirty="0"/>
+              <a:t>？ </a:t>
+            </a:r>
+            <a:endParaRPr lang="en-US" altLang="zh-CN" sz="2396" dirty="0"/>
+          </a:p>
+          <a:p>
+            <a:pPr marL="457200" indent="-457200">
+              <a:buAutoNum type="arabicPeriod"/>
+            </a:pPr>
+            <a:r>
+              <a:rPr lang="zh-CN" altLang="en-US" sz="2396" dirty="0"/>
+              <a:t>出血的诊疗过程存在哪一些问题？</a:t>
+            </a:r>
+            <a:endParaRPr lang="en-US" altLang="zh-CN" sz="2396" dirty="0"/>
+          </a:p>
+          <a:p>
+            <a:pPr marL="0" indent="0">
+              <a:buNone/>
+            </a:pPr>
+            <a:endParaRPr lang="en-US" sz="2396" dirty="0"/>
+          </a:p>
+          <a:p>
+            <a:pPr marL="0" indent="0">
+              <a:buNone/>
+            </a:pPr>
+            <a:endParaRPr lang="en-US" sz="2396" dirty="0"/>
+          </a:p>
+        </p:txBody>
+      </p:sp>
+      <p:sp>
+        <p:nvSpPr>
+          <p:cNvPr id="5" name="Text 3">
+            <a:extLst>
+              <a:ext uri="{FF2B5EF4-FFF2-40B4-BE49-F238E27FC236}">
+                <a16:creationId xmlns:a16="http://schemas.microsoft.com/office/drawing/2014/main" id="{71253E22-E720-9281-EA00-A4AFDE0848A1}"/>
+              </a:ext>
+            </a:extLst>
+          </p:cNvPr>
+          <p:cNvSpPr/>
+          <p:nvPr/>
+        </p:nvSpPr>
+        <p:spPr>
+          <a:xfrm>
+            <a:off x="9162288" y="585216"/>
+            <a:ext cx="2240280" cy="201168"/>
+          </a:xfrm>
+          <a:prstGeom prst="rect">
+            <a:avLst/>
+          </a:prstGeom>
+          <a:noFill/>
+          <a:ln/>
+        </p:spPr>
+        <p:txBody>
+          <a:bodyPr wrap="square" lIns="0" tIns="0" rIns="0" bIns="0" rtlCol="0" anchor="ctr"/>
+          <a:lstStyle/>
+          <a:p>
+            <a:pPr marL="0" indent="0" algn="r">
+              <a:buNone/>
+            </a:pPr>
+            <a:r>
+              <a:rPr lang="en-US" sz="1020" dirty="0">
+                <a:solidFill>
+                  <a:srgbClr val="1A8EA8"/>
+                </a:solidFill>
+                <a:latin typeface="Aptos" pitchFamily="34" charset="0"/>
+                <a:ea typeface="Aptos" pitchFamily="34" charset="-122"/>
+                <a:cs typeface="Aptos" pitchFamily="34" charset="-120"/>
+              </a:rPr>
+              <a:t>NEAR-TERM EXECUTION</a:t>
+            </a:r>
+            <a:endParaRPr lang="en-US" sz="1020" dirty="0"/>
+          </a:p>
+        </p:txBody>
+      </p:sp>
+      <p:sp>
+        <p:nvSpPr>
+          <p:cNvPr id="31" name="Text 29">
+            <a:extLst>
+              <a:ext uri="{FF2B5EF4-FFF2-40B4-BE49-F238E27FC236}">
+                <a16:creationId xmlns:a16="http://schemas.microsoft.com/office/drawing/2014/main" id="{6283E585-BC0C-A6ED-394A-4EC0BA4D1318}"/>
+              </a:ext>
+            </a:extLst>
+          </p:cNvPr>
+          <p:cNvSpPr/>
+          <p:nvPr/>
+        </p:nvSpPr>
+        <p:spPr>
+          <a:xfrm>
+            <a:off x="11137392" y="6537960"/>
+            <a:ext cx="502920" cy="164592"/>
+          </a:xfrm>
+          <a:prstGeom prst="rect">
+            <a:avLst/>
+          </a:prstGeom>
+          <a:noFill/>
+          <a:ln/>
+        </p:spPr>
+        <p:txBody>
+          <a:bodyPr wrap="square" lIns="0" tIns="0" rIns="0" bIns="0" rtlCol="0" anchor="ctr"/>
+          <a:lstStyle/>
+          <a:p>
+            <a:pPr marL="0" indent="0" algn="r">
+              <a:buNone/>
+            </a:pPr>
+            <a:r>
+              <a:rPr lang="en-US" sz="950" b="1" dirty="0">
+                <a:solidFill>
+                  <a:srgbClr val="1A8EA8"/>
+                </a:solidFill>
+                <a:latin typeface="Aptos" pitchFamily="34" charset="0"/>
+                <a:ea typeface="Aptos" pitchFamily="34" charset="-122"/>
+                <a:cs typeface="Aptos" pitchFamily="34" charset="-120"/>
+              </a:rPr>
+              <a:t>10</a:t>
+            </a:r>
+            <a:endParaRPr lang="en-US" sz="950" dirty="0"/>
+          </a:p>
+        </p:txBody>
+      </p:sp>
+    </p:spTree>
+    <p:extLst>
+      <p:ext uri="{BB962C8B-B14F-4D97-AF65-F5344CB8AC3E}">
+        <p14:creationId xmlns:p14="http://schemas.microsoft.com/office/powerpoint/2010/main" val="3081969446"/>
+      </p:ext>
+    </p:extLst>
+  </p:cSld>
+  <p:clrMapOvr>
+    <a:masterClrMapping/>
+  </p:clrMapOvr>
+</p:sld>
+</file>
+
 <file path=ppt/slides/slide2.xml><?xml version="1.0" encoding="utf-8"?>
 <p:sld xmlns:a="http://schemas.openxmlformats.org/drawingml/2006/main" xmlns:r="http://schemas.openxmlformats.org/officeDocument/2006/relationships" xmlns:p="http://schemas.openxmlformats.org/presentationml/2006/main">
   <p:cSld name="Slide 2">
@@ -2395,8 +2818,8 @@
         </p:nvSpPr>
         <p:spPr>
           <a:xfrm>
-            <a:off x="7964424" y="4711747"/>
-            <a:ext cx="2676603" cy="1106425"/>
+            <a:off x="8027259" y="4803594"/>
+            <a:ext cx="2572458" cy="988396"/>
           </a:xfrm>
           <a:prstGeom prst="roundRect">
             <a:avLst>
@@ -3666,6 +4089,28 @@
               <a:buNone/>
             </a:pPr>
             <a:r>
+              <a:rPr lang="en-US" b="1" dirty="0" err="1">
+                <a:solidFill>
+                  <a:srgbClr val="234B63"/>
+                </a:solidFill>
+                <a:latin typeface="Microsoft YaHei" pitchFamily="34" charset="0"/>
+                <a:ea typeface="Microsoft YaHei" pitchFamily="34" charset="-122"/>
+                <a:cs typeface="Microsoft YaHei" pitchFamily="34" charset="-120"/>
+              </a:rPr>
+              <a:t>第一阶段先收敛到脑</a:t>
+            </a:r>
+            <a:r>
+              <a:rPr lang="zh-CN" altLang="en-US" b="1" dirty="0">
+                <a:solidFill>
+                  <a:srgbClr val="234B63"/>
+                </a:solidFill>
+                <a:latin typeface="Microsoft YaHei" pitchFamily="34" charset="0"/>
+                <a:ea typeface="Microsoft YaHei" pitchFamily="34" charset="-122"/>
+                <a:cs typeface="Microsoft YaHei" pitchFamily="34" charset="-120"/>
+              </a:rPr>
+              <a:t>出血</a:t>
+            </a:r>
+            <a:r>
               <a:rPr lang="en-US" b="1" dirty="0">
                 <a:solidFill>
                   <a:srgbClr val="234B63"/>
@@ -3674,7 +4119,7 @@
                 <a:ea typeface="Microsoft YaHei" pitchFamily="34" charset="-122"/>
                 <a:cs typeface="Microsoft YaHei" pitchFamily="34" charset="-120"/>
               </a:rPr>
-              <a:t>第一阶段先收敛到脑肿瘤 MRI 最小闭环，而不是一开始做全神经外科智能诊疗</a:t>
+              <a:t> MRI 最小闭环，而不是一开始做全神经外科智能诊疗</a:t>
             </a:r>
             <a:r>
               <a:rPr lang="en-US" sz="1240" b="1" dirty="0">
@@ -6037,7 +6482,7 @@
         </p:nvSpPr>
         <p:spPr>
           <a:xfrm>
-            <a:off x="9272016" y="1755648"/>
+            <a:off x="9272016" y="3877056"/>
             <a:ext cx="1828800" cy="1060704"/>
           </a:xfrm>
           <a:prstGeom prst="roundRect">
@@ -6064,7 +6509,7 @@
         </p:nvSpPr>
         <p:spPr>
           <a:xfrm>
-            <a:off x="9381744" y="1993392"/>
+            <a:off x="9381744" y="4114800"/>
             <a:ext cx="1609344" cy="164592"/>
           </a:xfrm>
           <a:prstGeom prst="rect">
@@ -6103,7 +6548,7 @@
         </p:nvSpPr>
         <p:spPr>
           <a:xfrm>
-            <a:off x="9381744" y="2389214"/>
+            <a:off x="9381744" y="4510622"/>
             <a:ext cx="1609344" cy="273101"/>
           </a:xfrm>
           <a:prstGeom prst="rect">
@@ -6129,216 +6574,6 @@
                 <a:cs typeface="Microsoft YaHei" pitchFamily="34" charset="-120"/>
               </a:rPr>
               <a:t>它更适合快速组织多模态微调流程，减少第一阶段工程摩擦。</a:t>
-            </a:r>
-            <a:endParaRPr lang="en-US" sz="880" dirty="0"/>
-          </a:p>
-        </p:txBody>
-      </p:sp>
-      <p:sp>
-        <p:nvSpPr>
-          <p:cNvPr id="27" name="Shape 25"/>
-          <p:cNvSpPr/>
-          <p:nvPr/>
-        </p:nvSpPr>
-        <p:spPr>
-          <a:xfrm>
-            <a:off x="9272016" y="2999232"/>
-            <a:ext cx="1828800" cy="1060704"/>
-          </a:xfrm>
-          <a:prstGeom prst="roundRect">
-            <a:avLst>
-              <a:gd name="adj" fmla="val 4310"/>
-            </a:avLst>
-          </a:prstGeom>
-          <a:solidFill>
-            <a:srgbClr val="EDF8F4"/>
-          </a:solidFill>
-          <a:ln w="12700">
-            <a:solidFill>
-              <a:srgbClr val="CBE4D4"/>
-            </a:solidFill>
-            <a:prstDash val="solid"/>
-          </a:ln>
-        </p:spPr>
-      </p:sp>
-      <p:sp>
-        <p:nvSpPr>
-          <p:cNvPr id="28" name="Text 26"/>
-          <p:cNvSpPr/>
-          <p:nvPr/>
-        </p:nvSpPr>
-        <p:spPr>
-          <a:xfrm>
-            <a:off x="9381744" y="3183331"/>
-            <a:ext cx="1609344" cy="164592"/>
-          </a:xfrm>
-          <a:prstGeom prst="rect">
-            <a:avLst/>
-          </a:prstGeom>
-          <a:noFill/>
-          <a:ln/>
-        </p:spPr>
-        <p:txBody>
-          <a:bodyPr wrap="square" lIns="0" tIns="0" rIns="0" bIns="0" rtlCol="0" anchor="ctr"/>
-          <a:lstStyle/>
-          <a:p>
-            <a:pPr marL="0" indent="0">
-              <a:buNone/>
-            </a:pPr>
-            <a:r>
-              <a:rPr lang="en-US" sz="1020" b="1" dirty="0">
-                <a:solidFill>
-                  <a:srgbClr val="234B63"/>
-                </a:solidFill>
-                <a:latin typeface="Microsoft YaHei" pitchFamily="34" charset="0"/>
-                <a:ea typeface="Microsoft YaHei" pitchFamily="34" charset="-122"/>
-                <a:cs typeface="Microsoft YaHei" pitchFamily="34" charset="-120"/>
-              </a:rPr>
-              <a:t>embedding 检索为什么只是辅助</a:t>
-            </a:r>
-            <a:endParaRPr lang="en-US" sz="1020" dirty="0"/>
-          </a:p>
-        </p:txBody>
-      </p:sp>
-      <p:sp>
-        <p:nvSpPr>
-          <p:cNvPr id="29" name="Text 27"/>
-          <p:cNvSpPr/>
-          <p:nvPr/>
-        </p:nvSpPr>
-        <p:spPr>
-          <a:xfrm>
-            <a:off x="9381744" y="3567379"/>
-            <a:ext cx="1609344" cy="273101"/>
-          </a:xfrm>
-          <a:prstGeom prst="rect">
-            <a:avLst/>
-          </a:prstGeom>
-          <a:noFill/>
-          <a:ln/>
-        </p:spPr>
-        <p:txBody>
-          <a:bodyPr wrap="square" lIns="0" tIns="0" rIns="0" bIns="0" rtlCol="0" anchor="t"/>
-          <a:lstStyle/>
-          <a:p>
-            <a:pPr marL="0" indent="0">
-              <a:buNone/>
-            </a:pPr>
-            <a:r>
-              <a:rPr lang="en-US" sz="880" dirty="0">
-                <a:solidFill>
-                  <a:srgbClr val="48636E"/>
-                </a:solidFill>
-                <a:latin typeface="Microsoft YaHei" pitchFamily="34" charset="0"/>
-                <a:ea typeface="Microsoft YaHei" pitchFamily="34" charset="-122"/>
-                <a:cs typeface="Microsoft YaHei" pitchFamily="34" charset="-120"/>
-              </a:rPr>
-              <a:t>它可以做表征检查或候选召回辅助，但不是最终主目标。</a:t>
-            </a:r>
-            <a:endParaRPr lang="en-US" sz="880" dirty="0"/>
-          </a:p>
-        </p:txBody>
-      </p:sp>
-      <p:sp>
-        <p:nvSpPr>
-          <p:cNvPr id="30" name="Shape 28"/>
-          <p:cNvSpPr/>
-          <p:nvPr/>
-        </p:nvSpPr>
-        <p:spPr>
-          <a:xfrm>
-            <a:off x="9272016" y="4242816"/>
-            <a:ext cx="1828800" cy="1006450"/>
-          </a:xfrm>
-          <a:prstGeom prst="roundRect">
-            <a:avLst>
-              <a:gd name="adj" fmla="val 4310"/>
-            </a:avLst>
-          </a:prstGeom>
-          <a:solidFill>
-            <a:srgbClr val="FDF2F1"/>
-          </a:solidFill>
-          <a:ln w="12700">
-            <a:solidFill>
-              <a:srgbClr val="E2C9C9"/>
-            </a:solidFill>
-            <a:prstDash val="solid"/>
-          </a:ln>
-        </p:spPr>
-      </p:sp>
-      <p:sp>
-        <p:nvSpPr>
-          <p:cNvPr id="31" name="Text 29"/>
-          <p:cNvSpPr/>
-          <p:nvPr/>
-        </p:nvSpPr>
-        <p:spPr>
-          <a:xfrm>
-            <a:off x="9381744" y="4444593"/>
-            <a:ext cx="1609344" cy="164592"/>
-          </a:xfrm>
-          <a:prstGeom prst="rect">
-            <a:avLst/>
-          </a:prstGeom>
-          <a:noFill/>
-          <a:ln/>
-        </p:spPr>
-        <p:txBody>
-          <a:bodyPr wrap="square" lIns="0" tIns="0" rIns="0" bIns="0" rtlCol="0" anchor="ctr"/>
-          <a:lstStyle/>
-          <a:p>
-            <a:pPr marL="0" indent="0">
-              <a:buNone/>
-            </a:pPr>
-            <a:r>
-              <a:rPr lang="en-US" sz="1020" b="1" dirty="0">
-                <a:solidFill>
-                  <a:srgbClr val="234B63"/>
-                </a:solidFill>
-                <a:latin typeface="Microsoft YaHei" pitchFamily="34" charset="0"/>
-                <a:ea typeface="Microsoft YaHei" pitchFamily="34" charset="-122"/>
-                <a:cs typeface="Microsoft YaHei" pitchFamily="34" charset="-120"/>
-              </a:rPr>
-              <a:t>为什么不先做重型 3D 端到端</a:t>
-            </a:r>
-            <a:endParaRPr lang="en-US" sz="1020" dirty="0"/>
-          </a:p>
-        </p:txBody>
-      </p:sp>
-      <p:sp>
-        <p:nvSpPr>
-          <p:cNvPr id="32" name="Text 30"/>
-          <p:cNvSpPr/>
-          <p:nvPr/>
-        </p:nvSpPr>
-        <p:spPr>
-          <a:xfrm>
-            <a:off x="9381744" y="4764633"/>
-            <a:ext cx="1609344" cy="273101"/>
-          </a:xfrm>
-          <a:prstGeom prst="rect">
-            <a:avLst/>
-          </a:prstGeom>
-          <a:noFill/>
-          <a:ln/>
-        </p:spPr>
-        <p:txBody>
-          <a:bodyPr wrap="square" lIns="0" tIns="0" rIns="0" bIns="0" rtlCol="0" anchor="t"/>
-          <a:lstStyle/>
-          <a:p>
-            <a:pPr marL="0" indent="0">
-              <a:buNone/>
-            </a:pPr>
-            <a:r>
-              <a:rPr lang="en-US" sz="880" dirty="0">
-                <a:solidFill>
-                  <a:srgbClr val="48636E"/>
-                </a:solidFill>
-                <a:latin typeface="Microsoft YaHei" pitchFamily="34" charset="0"/>
-                <a:ea typeface="Microsoft YaHei" pitchFamily="34" charset="-122"/>
-                <a:cs typeface="Microsoft YaHei" pitchFamily="34" charset="-120"/>
-              </a:rPr>
-              <a:t>因为显存、预处理和调参链太重，会拖慢闭环速度。</a:t>
             </a:r>
             <a:endParaRPr lang="en-US" sz="880" dirty="0"/>
           </a:p>
